--- a/public/fun/pack/pptx/familypro/가족소개프리미엄_34_나혼자·1인가구_포레스트골드.pptx
+++ b/public/fun/pack/pptx/familypro/가족소개프리미엄_34_나혼자·1인가구_포레스트골드.pptx
@@ -113,12 +113,12 @@
   <p:extLst>
     <p:ext uri="{521415D9-36F7-43E2-AB2F-B90AF26B5E84}">
       <p14:sectionLst xmlns:p14="http://schemas.microsoft.com/office/powerpoint/2010/main">
-        <p14:section name="시작" id="{9A0CCB51-FC0B-4EC2-9A39-7323123344E9}">
+        <p14:section name="시작" id="{DBC8239B-A6AF-4C4C-83DF-DD50F638F2CA}">
           <p14:sldIdLst>
             <p14:sldId id="256"/>
           </p14:sldIdLst>
         </p14:section>
-        <p14:section name="본문" id="{78D76207-D7C3-42D7-9F99-535212549CBD}">
+        <p14:section name="본문" id="{817B2A4B-1F2F-4B59-9198-2836CD4E998C}">
           <p14:sldIdLst>
             <p14:sldId id="257"/>
             <p14:sldId id="258"/>
@@ -127,7 +127,7 @@
             <p14:sldId id="261"/>
           </p14:sldIdLst>
         </p14:section>
-        <p14:section name="마무리" id="{18DCC51B-F04D-4A05-92AC-104FEEBDF09D}">
+        <p14:section name="마무리" id="{DF76B12E-2E7F-4E48-9FEE-C4DBAF3438DE}">
           <p14:sldIdLst>
             <p14:sldId id="262"/>
           </p14:sldIdLst>
@@ -1555,7 +1555,7 @@
             </a:lvl1pPr>
           </a:lstStyle>
           <a:p>
-            <a:fld id="{14464CC1-8DA3-442C-8410-0DD5C2678FEF}" type="slidenum">
+            <a:fld id="{B78AB858-6DB2-498C-9EE9-9A22D975CDB2}" type="slidenum">
               <a:rPr lang="en-US"/>
               <a:t>‹#›</a:t>
             </a:fld>
@@ -2273,7 +2273,7 @@
             </a:lvl1pPr>
           </a:lstStyle>
           <a:p>
-            <a:fld id="{EA638B8B-CAA0-4068-8571-D3BCE2132D3E}" type="slidenum">
+            <a:fld id="{8F7F2032-9624-484D-AF04-0ABDEF936116}" type="slidenum">
               <a:rPr lang="en-US"/>
               <a:t>‹#›</a:t>
             </a:fld>
@@ -2957,7 +2957,7 @@
             </a:lvl1pPr>
           </a:lstStyle>
           <a:p>
-            <a:fld id="{550E8067-6E95-4CFE-B729-1A4A6D1F433A}" type="slidenum">
+            <a:fld id="{5E552BF2-15AF-4A8D-84B3-2DF752F43757}" type="slidenum">
               <a:rPr lang="en-US"/>
               <a:t>‹#›</a:t>
             </a:fld>
@@ -3802,7 +3802,7 @@
           <a:p>
             <a:r>
               <a:rPr lang="ko-KR"/>
-              <a:t>나 혼자 · 1인 가구 · 0000. 00. 00</a:t>
+              <a:t>나 혼자 · 1인 가구 · 날짜 입력</a:t>
             </a:r>
           </a:p>
         </p:txBody>
@@ -4091,7 +4091,7 @@
           <a:bodyPr/>
           <a:lstStyle/>
           <a:p>
-            <a:fld id="{2EF40663-133B-4445-9699-64707821AB33}" type="slidenum">
+            <a:fld id="{BB1FE975-E260-45AD-8C1D-3A9B63B1A989}" type="slidenum">
               <a:rPr lang="en-US"/>
               <a:t>‹#›</a:t>
             </a:fld>
@@ -4650,7 +4650,7 @@
           <a:bodyPr/>
           <a:lstStyle/>
           <a:p>
-            <a:fld id="{F7167F1A-DE6E-4DD8-BF95-A1302DCD000B}" type="slidenum">
+            <a:fld id="{BAA58EB8-9BB1-4DDB-BEB7-D0F128D1906F}" type="slidenum">
               <a:rPr lang="en-US"/>
               <a:t>‹#›</a:t>
             </a:fld>
@@ -5625,7 +5625,7 @@
           <a:bodyPr/>
           <a:lstStyle/>
           <a:p>
-            <a:fld id="{C9661F85-6DCD-456B-8523-16B2C7D03D2F}" type="slidenum">
+            <a:fld id="{C4F84948-22E5-4130-B4E6-AF4758CDBD7F}" type="slidenum">
               <a:rPr lang="en-US"/>
               <a:t>‹#›</a:t>
             </a:fld>
@@ -6961,7 +6961,7 @@
           <a:bodyPr/>
           <a:lstStyle/>
           <a:p>
-            <a:fld id="{2F9BDFE3-C67F-46F7-9BE9-39A8A570AFE4}" type="slidenum">
+            <a:fld id="{3C42F48B-B322-4EDA-AF04-6CFC1EACA78A}" type="slidenum">
               <a:rPr lang="en-US"/>
               <a:t>‹#›</a:t>
             </a:fld>
@@ -7049,7 +7049,7 @@
           <a:bodyPr/>
           <a:lstStyle/>
           <a:p>
-            <a:fld id="{098F85F9-3F6E-48B4-99AE-17E6E872126C}" type="slidenum">
+            <a:fld id="{D7400B21-4AA5-4E31-820C-217F34431A3B}" type="slidenum">
               <a:rPr lang="en-US"/>
               <a:t>‹#›</a:t>
             </a:fld>
